--- a/06_defense/13组-摸鱼-答辩练习.pptx
+++ b/06_defense/13组-摸鱼-答辩练习.pptx
@@ -509,7 +509,7 @@
           <a:lstStyle/>
           <a:p>
             <a:r>
-              <a:t>报组号、项目名、仓库。3 分钟架构后切录屏。</a:t>
+              <a:t>报组号、项目名、仓库。</a:t>
             </a:r>
           </a:p>
         </p:txBody>
